--- a/preaching/被聖靈充滿.pptx
+++ b/preaching/被聖靈充滿.pptx
@@ -3588,7 +3588,7 @@
             <a:pPr lvl="3"/>
             <a:r>
               <a:rPr lang="zh-CHT" altLang="en-US" sz="2000" dirty="0" smtClean="0"/>
-              <a:t>但 聖 靈 降 臨 在 你 們 身 上 ， 你 們 就 必 得 著 能 力 ， 並 要 在 耶 路 撒 冷 、 猶 太 全 地 ， 和 撒 瑪 利 亞 ， 直 到 地 極 ， 作 我 的 見 證</a:t>
+              <a:t>但 聖 靈 降 臨 在 你 們 身 上 ， 你 們 就 必 得 着 能 力 ， 並 要 在 耶 路 撒 冷 、 猶 太 全 地 ， 和 撒 瑪 利 亞 ， 直 到 地 極 ， 作 我 的 見 證</a:t>
             </a:r>
             <a:r>
               <a:rPr lang="zh-TW" altLang="en-US" sz="2000" dirty="0" smtClean="0"/>
@@ -3774,7 +3774,7 @@
             <a:pPr lvl="3"/>
             <a:r>
               <a:rPr lang="zh-CHT" altLang="en-US" sz="3600" dirty="0" smtClean="0"/>
-              <a:t>我 所 賜 的 水 要 在 他 裡 頭 成 為 泉 源 ， 直 湧 到 永 生 。</a:t>
+              <a:t>我 所 賜 的 水 要 在 他 裏 頭 成 為 泉 源 ， 直 湧 到 永 生 。</a:t>
             </a:r>
             <a:r>
               <a:rPr lang="zh-TW" altLang="en-US" sz="3600" b="1" dirty="0" smtClean="0"/>
@@ -3817,7 +3817,7 @@
             <a:pPr lvl="3"/>
             <a:r>
               <a:rPr lang="zh-CHT" altLang="en-US" sz="3600" dirty="0" smtClean="0"/>
-              <a:t>信 我 的 人 就 如 經 上 所 說 ： 從 他 腹 中 要 流 出 活 水 的 江 河 來 。耶 穌 這 話 是 指 著 信 他 之 人 要 受 聖 靈 說 的 。</a:t>
+              <a:t>信 我 的 人 就 如 經 上 所 說 ： 『 從 他 腹 中 要 流 出 活 水 的 江 河 來 。 』 」耶 穌 這 話 是 指 着 信 他 之 人 要 受 聖 靈 說 的 。</a:t>
             </a:r>
             <a:r>
               <a:rPr lang="zh-TW" altLang="en-US" sz="3600" b="1" dirty="0" smtClean="0"/>
@@ -3994,7 +3994,7 @@
             <a:pPr lvl="2"/>
             <a:r>
               <a:rPr lang="zh-CHT" altLang="en-US" sz="3600" dirty="0" smtClean="0"/>
-              <a:t>然 而 ， 叫 耶 穌 從 死 裡 復 活 者 的 靈 若 住 在 你 們 心 裡 ， 那 叫 基 督 耶 穌 從 死 裡 復 活 的 ， 也 必 藉 著 住 在 你 們 心 裡 的 聖 靈 ， 使 你 們 必 死 的 身 體 又 活 過 來 </a:t>
+              <a:t>然 而 ， 叫 耶 穌 從 死 裏 復 活 者 的 靈 若 住 在 你 們 心 裏 ， 那 叫 基 督 耶 穌 從 死 裏 復 活 的 ， 也 必 藉 着 住 在 你 們 心 裏 的 聖 靈 ， 使 你 們 必 死 的 身 體 又 活 過 來 </a:t>
             </a:r>
             <a:r>
               <a:rPr lang="zh-TW" altLang="en-US" sz="3600" b="1" dirty="0" smtClean="0"/>
@@ -6767,7 +6767,7 @@
             </a:r>
             <a:r>
               <a:rPr lang="zh-CHT" altLang="en-US" sz="2400" dirty="0" smtClean="0"/>
-              <a:t>們 既 為 兒 子 ， 神 就 差 他 兒 子 的 靈 進 入 你 們 （ 原 文 作 我 們 ） 的 心 ， 呼 叫 ： 阿 爸 ！ 父 ！</a:t>
+              <a:t>們 既 為 兒 子 ， 神 就 差 他 兒 子 的 靈 進 入 你 們 （ 原 文 作 我 們 ） 的 心 ， 呼 叫 ： 「 阿 爸 ！ 父 ！ 」</a:t>
             </a:r>
             <a:r>
               <a:rPr lang="zh-TW" altLang="en-US" sz="2400" dirty="0" smtClean="0"/>
@@ -6814,7 +6814,7 @@
             </a:r>
             <a:r>
               <a:rPr lang="zh-CHT" altLang="en-US" sz="2400" dirty="0" smtClean="0"/>
-              <a:t>得 說 ： 你 們 各 人 要 悔 改 ， 奉 耶 穌 基 督 的 名 受 洗 ， 叫 你 們 的 罪 得 赦 ， 就 必 領 受 所 賜 的 聖 靈 ；</a:t>
+              <a:t>得 說 ： 「 你 們 各 人 要 悔 改 ， 奉 耶 穌 基 督 的 名 受 洗 ， 叫 你 們 的 罪 得 赦 ， 就 必 領 受 所 賜 的 聖 靈 ； 」</a:t>
             </a:r>
             <a:r>
               <a:rPr lang="zh-TW" altLang="en-US" sz="2400" dirty="0" smtClean="0"/>
@@ -7068,11 +7068,11 @@
             </a:r>
             <a:r>
               <a:rPr lang="zh-CHT" altLang="en-US" sz="2800" dirty="0"/>
-              <a:t>我 的 人 就 如 經 上 所 說 ： 從 他 腹 中 要 流 出 活 水 的 江 河 來 </a:t>
+              <a:t>我 的 人 就 如 經 上 所 說 ： 『 從 他 腹 中 要 流 出 活 水 的 江 河 來 </a:t>
             </a:r>
             <a:r>
               <a:rPr lang="zh-CHT" altLang="en-US" sz="2800" dirty="0" smtClean="0"/>
-              <a:t>。</a:t>
+              <a:t>。 』 」</a:t>
             </a:r>
             <a:r>
               <a:rPr lang="en-US" altLang="zh-CHT" sz="2800" dirty="0" smtClean="0"/>
@@ -7084,7 +7084,7 @@
             </a:r>
             <a:r>
               <a:rPr lang="zh-CHT" altLang="en-US" sz="2800" dirty="0"/>
-              <a:t>穌 這 話 是 指 著 信 他 之 人 要 受 聖 靈 說 的 </a:t>
+              <a:t>穌 這 話 是 指 着 信 他 之 人 要 受 聖 靈 說 的 </a:t>
             </a:r>
             <a:r>
               <a:rPr lang="zh-CHT" altLang="en-US" sz="2800" dirty="0" smtClean="0"/>
@@ -7445,7 +7445,7 @@
             </a:r>
             <a:r>
               <a:rPr lang="zh-CHT" altLang="en-US" sz="2400" dirty="0"/>
-              <a:t>要 將 我 父 所 應 許 的 降 在 你 們 身 上 ， 你 們 要 在 城 裡 等 候 ， 直 到 你 們 領 受 從 上 頭 來 的 能 力 </a:t>
+              <a:t>要 將 我 父 所 應 許 的 降 在 你 們 身 上 ， 你 們 要 在 城 裏 等 候 ， 直 到 你 們 領 受 從 上 頭 來 的 能 力 </a:t>
             </a:r>
             <a:r>
               <a:rPr lang="zh-TW" altLang="en-US" sz="2400" dirty="0" smtClean="0"/>
@@ -7498,7 +7498,7 @@
             </a:r>
             <a:r>
               <a:rPr lang="zh-CHT" altLang="en-US" sz="2400" dirty="0"/>
-              <a:t>們 雖 然 不 好 ， 尚 且 知 道 拿 好 東 西 給 兒 女 ； 何 況 天 父 ， 豈 不 更 將 聖 靈 給 求 他 的 人 麼 </a:t>
+              <a:t>們 雖 然 不 好 ， 尚 且 知 道 拿 好 東 西 給 兒 女 ； 何 況 天 父 ， 豈 不 更 將 聖 靈 給 求 他 的 人 嗎 </a:t>
             </a:r>
             <a:r>
               <a:rPr lang="zh-CHT" altLang="en-US" sz="2400" dirty="0" smtClean="0"/>
@@ -7878,7 +7878,7 @@
                   <a:srgbClr val="800000"/>
                 </a:solidFill>
               </a:rPr>
-              <a:t>們 作 兒 女 的 ， 要 在 主 裡 聽 從 父 母</a:t>
+              <a:t>們 作 兒 女 的 ， 要 在 主 裏 聽 從 父 母</a:t>
             </a:r>
             <a:endParaRPr lang="en-US" sz="2200" b="1" dirty="0" smtClean="0">
               <a:solidFill>
@@ -8257,7 +8257,7 @@
             <a:pPr lvl="3"/>
             <a:r>
               <a:rPr lang="zh-CHT" altLang="en-US" sz="2600" dirty="0" smtClean="0"/>
-              <a:t>現 在 我 往 耶 路 撒 冷 去 ， 心 甚 迫 切 （ 原 文 是 心 被 捆 綁 ） ， 不 知 道 在 那 裡 要 遇 見 甚 麼 事 ；</a:t>
+              <a:t>現 在 我 往 耶 路 撒 冷 去 ， 心 甚 迫 切 （ 原 文 是 心 被 捆 綁 ） ， 不 知 道 在 那 裏 要 遇 見 甚 麼 事 ；</a:t>
             </a:r>
             <a:r>
               <a:rPr lang="en-US" altLang="zh-CHT" sz="2600" dirty="0" smtClean="0"/>
@@ -8265,7 +8265,7 @@
             </a:r>
             <a:r>
               <a:rPr lang="zh-CHT" altLang="en-US" sz="2600" dirty="0" smtClean="0"/>
-              <a:t>但 知 道 聖 靈 在 各 城 裡 向 我 指 證 ， 說 有 捆 鎖 與 患 難 等 待 我 。</a:t>
+              <a:t>但 知 道 聖 靈 在 各 城 裏 向 我 指 證 ， 說 有 捆 鎖 與 患 難 等 待 我 。</a:t>
             </a:r>
           </a:p>
           <a:p>
